--- a/Lectures/Chunk 9 - Matplotlib.pptx
+++ b/Lectures/Chunk 9 - Matplotlib.pptx
@@ -122,16 +122,161 @@
 </p:presentation>
 </file>
 
-<file path=ppt/revisionInfo.xml><?xml version="1.0" encoding="utf-8"?>
-<p1510:revInfo xmlns:a="http://schemas.openxmlformats.org/drawingml/2006/main" xmlns:r="http://schemas.openxmlformats.org/officeDocument/2006/relationships" xmlns:p1510="http://schemas.microsoft.com/office/powerpoint/2015/10/main">
-  <p1510:revLst>
-    <p1510:client id="{256A9018-AECF-4963-8EC0-2214957FAF86}" v="1" dt="2025-10-04T21:37:04.844"/>
-  </p1510:revLst>
-</p1510:revInfo>
-</file>
-
 <file path=ppt/changesInfos/changesInfo1.xml><?xml version="1.0" encoding="utf-8"?>
 <pc:chgInfo xmlns:a="http://schemas.openxmlformats.org/drawingml/2006/main" xmlns:r="http://schemas.openxmlformats.org/officeDocument/2006/relationships" xmlns:ac="http://schemas.microsoft.com/office/drawing/2013/main/command" xmlns:pc="http://schemas.microsoft.com/office/powerpoint/2013/main/command">
+  <pc:docChgLst>
+    <pc:chgData name="Jonathan Bollig" userId="8b5d0afe-f106-45e0-8c3f-fd98fa124db1" providerId="ADAL" clId="{B108959E-8160-4214-BA0D-42D2F1070C03}"/>
+    <pc:docChg chg="undo custSel addSld modSld sldOrd">
+      <pc:chgData name="Jonathan Bollig" userId="8b5d0afe-f106-45e0-8c3f-fd98fa124db1" providerId="ADAL" clId="{B108959E-8160-4214-BA0D-42D2F1070C03}" dt="2025-08-18T09:38:51.161" v="3588" actId="20577"/>
+      <pc:docMkLst>
+        <pc:docMk/>
+      </pc:docMkLst>
+      <pc:sldChg chg="modSp new mod">
+        <pc:chgData name="Jonathan Bollig" userId="8b5d0afe-f106-45e0-8c3f-fd98fa124db1" providerId="ADAL" clId="{B108959E-8160-4214-BA0D-42D2F1070C03}" dt="2025-08-17T16:47:18.038" v="2214" actId="790"/>
+        <pc:sldMkLst>
+          <pc:docMk/>
+          <pc:sldMk cId="836289018" sldId="256"/>
+        </pc:sldMkLst>
+      </pc:sldChg>
+      <pc:sldChg chg="modSp new mod">
+        <pc:chgData name="Jonathan Bollig" userId="8b5d0afe-f106-45e0-8c3f-fd98fa124db1" providerId="ADAL" clId="{B108959E-8160-4214-BA0D-42D2F1070C03}" dt="2025-08-17T16:47:18.038" v="2214" actId="790"/>
+        <pc:sldMkLst>
+          <pc:docMk/>
+          <pc:sldMk cId="3656329933" sldId="257"/>
+        </pc:sldMkLst>
+      </pc:sldChg>
+      <pc:sldChg chg="addSp delSp modSp new mod modNotesTx">
+        <pc:chgData name="Jonathan Bollig" userId="8b5d0afe-f106-45e0-8c3f-fd98fa124db1" providerId="ADAL" clId="{B108959E-8160-4214-BA0D-42D2F1070C03}" dt="2025-08-18T09:08:46.312" v="2773" actId="20577"/>
+        <pc:sldMkLst>
+          <pc:docMk/>
+          <pc:sldMk cId="544279955" sldId="258"/>
+        </pc:sldMkLst>
+      </pc:sldChg>
+      <pc:sldChg chg="addSp modSp new mod">
+        <pc:chgData name="Jonathan Bollig" userId="8b5d0afe-f106-45e0-8c3f-fd98fa124db1" providerId="ADAL" clId="{B108959E-8160-4214-BA0D-42D2F1070C03}" dt="2025-08-17T17:17:31.026" v="2605" actId="20577"/>
+        <pc:sldMkLst>
+          <pc:docMk/>
+          <pc:sldMk cId="2169503629" sldId="259"/>
+        </pc:sldMkLst>
+      </pc:sldChg>
+      <pc:sldChg chg="modSp new mod">
+        <pc:chgData name="Jonathan Bollig" userId="8b5d0afe-f106-45e0-8c3f-fd98fa124db1" providerId="ADAL" clId="{B108959E-8160-4214-BA0D-42D2F1070C03}" dt="2025-08-18T09:38:51.161" v="3588" actId="20577"/>
+        <pc:sldMkLst>
+          <pc:docMk/>
+          <pc:sldMk cId="2533283895" sldId="260"/>
+        </pc:sldMkLst>
+      </pc:sldChg>
+      <pc:sldChg chg="addSp delSp modSp new mod setBg">
+        <pc:chgData name="Jonathan Bollig" userId="8b5d0afe-f106-45e0-8c3f-fd98fa124db1" providerId="ADAL" clId="{B108959E-8160-4214-BA0D-42D2F1070C03}" dt="2025-08-17T17:07:09.185" v="2483" actId="5793"/>
+        <pc:sldMkLst>
+          <pc:docMk/>
+          <pc:sldMk cId="847849653" sldId="261"/>
+        </pc:sldMkLst>
+      </pc:sldChg>
+      <pc:sldChg chg="modSp new mod">
+        <pc:chgData name="Jonathan Bollig" userId="8b5d0afe-f106-45e0-8c3f-fd98fa124db1" providerId="ADAL" clId="{B108959E-8160-4214-BA0D-42D2F1070C03}" dt="2025-08-17T16:47:18.038" v="2214" actId="790"/>
+        <pc:sldMkLst>
+          <pc:docMk/>
+          <pc:sldMk cId="1908144578" sldId="262"/>
+        </pc:sldMkLst>
+      </pc:sldChg>
+      <pc:sldChg chg="modSp new mod">
+        <pc:chgData name="Jonathan Bollig" userId="8b5d0afe-f106-45e0-8c3f-fd98fa124db1" providerId="ADAL" clId="{B108959E-8160-4214-BA0D-42D2F1070C03}" dt="2025-08-17T16:47:18.038" v="2214" actId="790"/>
+        <pc:sldMkLst>
+          <pc:docMk/>
+          <pc:sldMk cId="4076698392" sldId="263"/>
+        </pc:sldMkLst>
+      </pc:sldChg>
+      <pc:sldChg chg="modSp new mod">
+        <pc:chgData name="Jonathan Bollig" userId="8b5d0afe-f106-45e0-8c3f-fd98fa124db1" providerId="ADAL" clId="{B108959E-8160-4214-BA0D-42D2F1070C03}" dt="2025-08-17T17:04:25.114" v="2368" actId="20577"/>
+        <pc:sldMkLst>
+          <pc:docMk/>
+          <pc:sldMk cId="3708449378" sldId="264"/>
+        </pc:sldMkLst>
+      </pc:sldChg>
+      <pc:sldChg chg="addSp delSp modSp new mod modNotesTx">
+        <pc:chgData name="Jonathan Bollig" userId="8b5d0afe-f106-45e0-8c3f-fd98fa124db1" providerId="ADAL" clId="{B108959E-8160-4214-BA0D-42D2F1070C03}" dt="2025-08-18T09:38:09.362" v="3531" actId="20577"/>
+        <pc:sldMkLst>
+          <pc:docMk/>
+          <pc:sldMk cId="933916611" sldId="265"/>
+        </pc:sldMkLst>
+      </pc:sldChg>
+      <pc:sldChg chg="modSp new mod ord">
+        <pc:chgData name="Jonathan Bollig" userId="8b5d0afe-f106-45e0-8c3f-fd98fa124db1" providerId="ADAL" clId="{B108959E-8160-4214-BA0D-42D2F1070C03}" dt="2025-08-18T09:21:09.777" v="2944" actId="20577"/>
+        <pc:sldMkLst>
+          <pc:docMk/>
+          <pc:sldMk cId="2117799034" sldId="266"/>
+        </pc:sldMkLst>
+      </pc:sldChg>
+    </pc:docChg>
+  </pc:docChgLst>
+  <pc:docChgLst>
+    <pc:chgData name="Jonathan Bollig" userId="8b5d0afe-f106-45e0-8c3f-fd98fa124db1" providerId="ADAL" clId="{B2469FA9-EBD8-4834-A16D-CBF8EFC907DD}"/>
+    <pc:docChg chg="custSel addSld delSld modSld">
+      <pc:chgData name="Jonathan Bollig" userId="8b5d0afe-f106-45e0-8c3f-fd98fa124db1" providerId="ADAL" clId="{B2469FA9-EBD8-4834-A16D-CBF8EFC907DD}" dt="2025-10-07T00:02:20.001" v="20" actId="20577"/>
+      <pc:docMkLst>
+        <pc:docMk/>
+      </pc:docMkLst>
+      <pc:sldChg chg="modSp mod">
+        <pc:chgData name="Jonathan Bollig" userId="8b5d0afe-f106-45e0-8c3f-fd98fa124db1" providerId="ADAL" clId="{B2469FA9-EBD8-4834-A16D-CBF8EFC907DD}" dt="2025-10-07T00:02:20.001" v="20" actId="20577"/>
+        <pc:sldMkLst>
+          <pc:docMk/>
+          <pc:sldMk cId="836289018" sldId="256"/>
+        </pc:sldMkLst>
+        <pc:spChg chg="mod">
+          <ac:chgData name="Jonathan Bollig" userId="8b5d0afe-f106-45e0-8c3f-fd98fa124db1" providerId="ADAL" clId="{B2469FA9-EBD8-4834-A16D-CBF8EFC907DD}" dt="2025-09-30T13:24:16.541" v="12" actId="6549"/>
+          <ac:spMkLst>
+            <pc:docMk/>
+            <pc:sldMk cId="836289018" sldId="256"/>
+            <ac:spMk id="2" creationId="{40F72F59-52B3-6063-A2E3-2AA45125A99B}"/>
+          </ac:spMkLst>
+        </pc:spChg>
+        <pc:spChg chg="mod">
+          <ac:chgData name="Jonathan Bollig" userId="8b5d0afe-f106-45e0-8c3f-fd98fa124db1" providerId="ADAL" clId="{B2469FA9-EBD8-4834-A16D-CBF8EFC907DD}" dt="2025-10-07T00:02:20.001" v="20" actId="20577"/>
+          <ac:spMkLst>
+            <pc:docMk/>
+            <pc:sldMk cId="836289018" sldId="256"/>
+            <ac:spMk id="3" creationId="{62F76653-44B5-8707-B179-FDB90CB514B7}"/>
+          </ac:spMkLst>
+        </pc:spChg>
+      </pc:sldChg>
+      <pc:sldChg chg="add del">
+        <pc:chgData name="Jonathan Bollig" userId="8b5d0afe-f106-45e0-8c3f-fd98fa124db1" providerId="ADAL" clId="{B2469FA9-EBD8-4834-A16D-CBF8EFC907DD}" dt="2025-10-01T19:19:23.559" v="15" actId="47"/>
+        <pc:sldMkLst>
+          <pc:docMk/>
+          <pc:sldMk cId="2169503629" sldId="259"/>
+        </pc:sldMkLst>
+      </pc:sldChg>
+      <pc:sldChg chg="del">
+        <pc:chgData name="Jonathan Bollig" userId="8b5d0afe-f106-45e0-8c3f-fd98fa124db1" providerId="ADAL" clId="{B2469FA9-EBD8-4834-A16D-CBF8EFC907DD}" dt="2025-09-29T18:19:05.919" v="10" actId="47"/>
+        <pc:sldMkLst>
+          <pc:docMk/>
+          <pc:sldMk cId="932306145" sldId="260"/>
+        </pc:sldMkLst>
+      </pc:sldChg>
+      <pc:sldChg chg="add">
+        <pc:chgData name="Jonathan Bollig" userId="8b5d0afe-f106-45e0-8c3f-fd98fa124db1" providerId="ADAL" clId="{B2469FA9-EBD8-4834-A16D-CBF8EFC907DD}" dt="2025-10-01T16:46:41.864" v="13"/>
+        <pc:sldMkLst>
+          <pc:docMk/>
+          <pc:sldMk cId="2138807736" sldId="267"/>
+        </pc:sldMkLst>
+      </pc:sldChg>
+      <pc:sldChg chg="add del">
+        <pc:chgData name="Jonathan Bollig" userId="8b5d0afe-f106-45e0-8c3f-fd98fa124db1" providerId="ADAL" clId="{B2469FA9-EBD8-4834-A16D-CBF8EFC907DD}" dt="2025-10-02T22:34:59.093" v="17" actId="47"/>
+        <pc:sldMkLst>
+          <pc:docMk/>
+          <pc:sldMk cId="2385805343" sldId="268"/>
+        </pc:sldMkLst>
+      </pc:sldChg>
+      <pc:sldChg chg="modSp add">
+        <pc:chgData name="Jonathan Bollig" userId="8b5d0afe-f106-45e0-8c3f-fd98fa124db1" providerId="ADAL" clId="{B2469FA9-EBD8-4834-A16D-CBF8EFC907DD}" dt="2025-10-04T21:37:04.844" v="18"/>
+        <pc:sldMkLst>
+          <pc:docMk/>
+          <pc:sldMk cId="2113368255" sldId="269"/>
+        </pc:sldMkLst>
+      </pc:sldChg>
+    </pc:docChg>
+  </pc:docChgLst>
   <pc:docChgLst>
     <pc:chgData name="Jonathan Bollig" userId="8b5d0afe-f106-45e0-8c3f-fd98fa124db1" providerId="ADAL" clId="{891409C9-2319-433B-8001-2E1CE368518E}"/>
     <pc:docChg chg="custSel addSld delSld modSld">
@@ -225,159 +370,6 @@
       </pc:sldChg>
     </pc:docChg>
   </pc:docChgLst>
-  <pc:docChgLst>
-    <pc:chgData name="Jonathan Bollig" userId="8b5d0afe-f106-45e0-8c3f-fd98fa124db1" providerId="ADAL" clId="{B108959E-8160-4214-BA0D-42D2F1070C03}"/>
-    <pc:docChg chg="undo custSel addSld modSld sldOrd">
-      <pc:chgData name="Jonathan Bollig" userId="8b5d0afe-f106-45e0-8c3f-fd98fa124db1" providerId="ADAL" clId="{B108959E-8160-4214-BA0D-42D2F1070C03}" dt="2025-08-18T09:38:51.161" v="3588" actId="20577"/>
-      <pc:docMkLst>
-        <pc:docMk/>
-      </pc:docMkLst>
-      <pc:sldChg chg="modSp new mod">
-        <pc:chgData name="Jonathan Bollig" userId="8b5d0afe-f106-45e0-8c3f-fd98fa124db1" providerId="ADAL" clId="{B108959E-8160-4214-BA0D-42D2F1070C03}" dt="2025-08-17T16:47:18.038" v="2214" actId="790"/>
-        <pc:sldMkLst>
-          <pc:docMk/>
-          <pc:sldMk cId="836289018" sldId="256"/>
-        </pc:sldMkLst>
-      </pc:sldChg>
-      <pc:sldChg chg="modSp new mod">
-        <pc:chgData name="Jonathan Bollig" userId="8b5d0afe-f106-45e0-8c3f-fd98fa124db1" providerId="ADAL" clId="{B108959E-8160-4214-BA0D-42D2F1070C03}" dt="2025-08-17T16:47:18.038" v="2214" actId="790"/>
-        <pc:sldMkLst>
-          <pc:docMk/>
-          <pc:sldMk cId="3656329933" sldId="257"/>
-        </pc:sldMkLst>
-      </pc:sldChg>
-      <pc:sldChg chg="addSp delSp modSp new mod modNotesTx">
-        <pc:chgData name="Jonathan Bollig" userId="8b5d0afe-f106-45e0-8c3f-fd98fa124db1" providerId="ADAL" clId="{B108959E-8160-4214-BA0D-42D2F1070C03}" dt="2025-08-18T09:08:46.312" v="2773" actId="20577"/>
-        <pc:sldMkLst>
-          <pc:docMk/>
-          <pc:sldMk cId="544279955" sldId="258"/>
-        </pc:sldMkLst>
-      </pc:sldChg>
-      <pc:sldChg chg="addSp modSp new mod">
-        <pc:chgData name="Jonathan Bollig" userId="8b5d0afe-f106-45e0-8c3f-fd98fa124db1" providerId="ADAL" clId="{B108959E-8160-4214-BA0D-42D2F1070C03}" dt="2025-08-17T17:17:31.026" v="2605" actId="20577"/>
-        <pc:sldMkLst>
-          <pc:docMk/>
-          <pc:sldMk cId="2169503629" sldId="259"/>
-        </pc:sldMkLst>
-      </pc:sldChg>
-      <pc:sldChg chg="modSp new mod">
-        <pc:chgData name="Jonathan Bollig" userId="8b5d0afe-f106-45e0-8c3f-fd98fa124db1" providerId="ADAL" clId="{B108959E-8160-4214-BA0D-42D2F1070C03}" dt="2025-08-18T09:38:51.161" v="3588" actId="20577"/>
-        <pc:sldMkLst>
-          <pc:docMk/>
-          <pc:sldMk cId="2533283895" sldId="260"/>
-        </pc:sldMkLst>
-      </pc:sldChg>
-      <pc:sldChg chg="addSp delSp modSp new mod setBg">
-        <pc:chgData name="Jonathan Bollig" userId="8b5d0afe-f106-45e0-8c3f-fd98fa124db1" providerId="ADAL" clId="{B108959E-8160-4214-BA0D-42D2F1070C03}" dt="2025-08-17T17:07:09.185" v="2483" actId="5793"/>
-        <pc:sldMkLst>
-          <pc:docMk/>
-          <pc:sldMk cId="847849653" sldId="261"/>
-        </pc:sldMkLst>
-      </pc:sldChg>
-      <pc:sldChg chg="modSp new mod">
-        <pc:chgData name="Jonathan Bollig" userId="8b5d0afe-f106-45e0-8c3f-fd98fa124db1" providerId="ADAL" clId="{B108959E-8160-4214-BA0D-42D2F1070C03}" dt="2025-08-17T16:47:18.038" v="2214" actId="790"/>
-        <pc:sldMkLst>
-          <pc:docMk/>
-          <pc:sldMk cId="1908144578" sldId="262"/>
-        </pc:sldMkLst>
-      </pc:sldChg>
-      <pc:sldChg chg="modSp new mod">
-        <pc:chgData name="Jonathan Bollig" userId="8b5d0afe-f106-45e0-8c3f-fd98fa124db1" providerId="ADAL" clId="{B108959E-8160-4214-BA0D-42D2F1070C03}" dt="2025-08-17T16:47:18.038" v="2214" actId="790"/>
-        <pc:sldMkLst>
-          <pc:docMk/>
-          <pc:sldMk cId="4076698392" sldId="263"/>
-        </pc:sldMkLst>
-      </pc:sldChg>
-      <pc:sldChg chg="modSp new mod">
-        <pc:chgData name="Jonathan Bollig" userId="8b5d0afe-f106-45e0-8c3f-fd98fa124db1" providerId="ADAL" clId="{B108959E-8160-4214-BA0D-42D2F1070C03}" dt="2025-08-17T17:04:25.114" v="2368" actId="20577"/>
-        <pc:sldMkLst>
-          <pc:docMk/>
-          <pc:sldMk cId="3708449378" sldId="264"/>
-        </pc:sldMkLst>
-      </pc:sldChg>
-      <pc:sldChg chg="addSp delSp modSp new mod modNotesTx">
-        <pc:chgData name="Jonathan Bollig" userId="8b5d0afe-f106-45e0-8c3f-fd98fa124db1" providerId="ADAL" clId="{B108959E-8160-4214-BA0D-42D2F1070C03}" dt="2025-08-18T09:38:09.362" v="3531" actId="20577"/>
-        <pc:sldMkLst>
-          <pc:docMk/>
-          <pc:sldMk cId="933916611" sldId="265"/>
-        </pc:sldMkLst>
-      </pc:sldChg>
-      <pc:sldChg chg="modSp new mod ord">
-        <pc:chgData name="Jonathan Bollig" userId="8b5d0afe-f106-45e0-8c3f-fd98fa124db1" providerId="ADAL" clId="{B108959E-8160-4214-BA0D-42D2F1070C03}" dt="2025-08-18T09:21:09.777" v="2944" actId="20577"/>
-        <pc:sldMkLst>
-          <pc:docMk/>
-          <pc:sldMk cId="2117799034" sldId="266"/>
-        </pc:sldMkLst>
-      </pc:sldChg>
-    </pc:docChg>
-  </pc:docChgLst>
-  <pc:docChgLst>
-    <pc:chgData name="Jonathan Bollig" userId="8b5d0afe-f106-45e0-8c3f-fd98fa124db1" providerId="ADAL" clId="{B2469FA9-EBD8-4834-A16D-CBF8EFC907DD}"/>
-    <pc:docChg chg="custSel addSld delSld modSld">
-      <pc:chgData name="Jonathan Bollig" userId="8b5d0afe-f106-45e0-8c3f-fd98fa124db1" providerId="ADAL" clId="{B2469FA9-EBD8-4834-A16D-CBF8EFC907DD}" dt="2025-10-04T21:37:04.844" v="18"/>
-      <pc:docMkLst>
-        <pc:docMk/>
-      </pc:docMkLst>
-      <pc:sldChg chg="modSp mod">
-        <pc:chgData name="Jonathan Bollig" userId="8b5d0afe-f106-45e0-8c3f-fd98fa124db1" providerId="ADAL" clId="{B2469FA9-EBD8-4834-A16D-CBF8EFC907DD}" dt="2025-09-30T13:24:16.541" v="12" actId="6549"/>
-        <pc:sldMkLst>
-          <pc:docMk/>
-          <pc:sldMk cId="836289018" sldId="256"/>
-        </pc:sldMkLst>
-        <pc:spChg chg="mod">
-          <ac:chgData name="Jonathan Bollig" userId="8b5d0afe-f106-45e0-8c3f-fd98fa124db1" providerId="ADAL" clId="{B2469FA9-EBD8-4834-A16D-CBF8EFC907DD}" dt="2025-09-30T13:24:16.541" v="12" actId="6549"/>
-          <ac:spMkLst>
-            <pc:docMk/>
-            <pc:sldMk cId="836289018" sldId="256"/>
-            <ac:spMk id="2" creationId="{40F72F59-52B3-6063-A2E3-2AA45125A99B}"/>
-          </ac:spMkLst>
-        </pc:spChg>
-      </pc:sldChg>
-      <pc:sldChg chg="add del">
-        <pc:chgData name="Jonathan Bollig" userId="8b5d0afe-f106-45e0-8c3f-fd98fa124db1" providerId="ADAL" clId="{B2469FA9-EBD8-4834-A16D-CBF8EFC907DD}" dt="2025-10-01T19:19:23.559" v="15" actId="47"/>
-        <pc:sldMkLst>
-          <pc:docMk/>
-          <pc:sldMk cId="2169503629" sldId="259"/>
-        </pc:sldMkLst>
-      </pc:sldChg>
-      <pc:sldChg chg="del">
-        <pc:chgData name="Jonathan Bollig" userId="8b5d0afe-f106-45e0-8c3f-fd98fa124db1" providerId="ADAL" clId="{B2469FA9-EBD8-4834-A16D-CBF8EFC907DD}" dt="2025-09-29T18:19:05.919" v="10" actId="47"/>
-        <pc:sldMkLst>
-          <pc:docMk/>
-          <pc:sldMk cId="932306145" sldId="260"/>
-        </pc:sldMkLst>
-      </pc:sldChg>
-      <pc:sldChg chg="add">
-        <pc:chgData name="Jonathan Bollig" userId="8b5d0afe-f106-45e0-8c3f-fd98fa124db1" providerId="ADAL" clId="{B2469FA9-EBD8-4834-A16D-CBF8EFC907DD}" dt="2025-10-01T16:46:41.864" v="13"/>
-        <pc:sldMkLst>
-          <pc:docMk/>
-          <pc:sldMk cId="2138807736" sldId="267"/>
-        </pc:sldMkLst>
-      </pc:sldChg>
-      <pc:sldChg chg="add del">
-        <pc:chgData name="Jonathan Bollig" userId="8b5d0afe-f106-45e0-8c3f-fd98fa124db1" providerId="ADAL" clId="{B2469FA9-EBD8-4834-A16D-CBF8EFC907DD}" dt="2025-10-02T22:34:59.093" v="17" actId="47"/>
-        <pc:sldMkLst>
-          <pc:docMk/>
-          <pc:sldMk cId="2385805343" sldId="268"/>
-        </pc:sldMkLst>
-      </pc:sldChg>
-      <pc:sldChg chg="modSp add">
-        <pc:chgData name="Jonathan Bollig" userId="8b5d0afe-f106-45e0-8c3f-fd98fa124db1" providerId="ADAL" clId="{B2469FA9-EBD8-4834-A16D-CBF8EFC907DD}" dt="2025-10-04T21:37:04.844" v="18"/>
-        <pc:sldMkLst>
-          <pc:docMk/>
-          <pc:sldMk cId="2113368255" sldId="269"/>
-        </pc:sldMkLst>
-        <pc:spChg chg="mod">
-          <ac:chgData name="Jonathan Bollig" userId="8b5d0afe-f106-45e0-8c3f-fd98fa124db1" providerId="ADAL" clId="{B2469FA9-EBD8-4834-A16D-CBF8EFC907DD}" dt="2025-10-04T21:37:04.844" v="18"/>
-          <ac:spMkLst>
-            <pc:docMk/>
-            <pc:sldMk cId="2113368255" sldId="269"/>
-            <ac:spMk id="3" creationId="{90A723FE-AE4A-BC31-F8DA-B479D4E846FF}"/>
-          </ac:spMkLst>
-        </pc:spChg>
-      </pc:sldChg>
-    </pc:docChg>
-  </pc:docChgLst>
 </pc:chgInfo>
 </file>
 
@@ -490,7 +482,7 @@
           <a:p>
             <a:fld id="{0B6CA2EE-5589-4682-AD7F-744DBF1E81F5}" type="datetimeFigureOut">
               <a:rPr lang="de-DE" smtClean="0"/>
-              <a:t>06.10.2025</a:t>
+              <a:t>07.10.2025</a:t>
             </a:fld>
             <a:endParaRPr lang="de-DE"/>
           </a:p>
@@ -992,7 +984,7 @@
           <a:p>
             <a:fld id="{ADA51F25-4808-47F4-BF6E-BCDC230DB01C}" type="datetimeFigureOut">
               <a:rPr lang="de-DE" smtClean="0"/>
-              <a:t>06.10.2025</a:t>
+              <a:t>07.10.2025</a:t>
             </a:fld>
             <a:endParaRPr lang="de-DE"/>
           </a:p>
@@ -1190,7 +1182,7 @@
           <a:p>
             <a:fld id="{ADA51F25-4808-47F4-BF6E-BCDC230DB01C}" type="datetimeFigureOut">
               <a:rPr lang="de-DE" smtClean="0"/>
-              <a:t>06.10.2025</a:t>
+              <a:t>07.10.2025</a:t>
             </a:fld>
             <a:endParaRPr lang="de-DE"/>
           </a:p>
@@ -1398,7 +1390,7 @@
           <a:p>
             <a:fld id="{ADA51F25-4808-47F4-BF6E-BCDC230DB01C}" type="datetimeFigureOut">
               <a:rPr lang="de-DE" smtClean="0"/>
-              <a:t>06.10.2025</a:t>
+              <a:t>07.10.2025</a:t>
             </a:fld>
             <a:endParaRPr lang="de-DE"/>
           </a:p>
@@ -1596,7 +1588,7 @@
           <a:p>
             <a:fld id="{ADA51F25-4808-47F4-BF6E-BCDC230DB01C}" type="datetimeFigureOut">
               <a:rPr lang="de-DE" smtClean="0"/>
-              <a:t>06.10.2025</a:t>
+              <a:t>07.10.2025</a:t>
             </a:fld>
             <a:endParaRPr lang="de-DE"/>
           </a:p>
@@ -1871,7 +1863,7 @@
           <a:p>
             <a:fld id="{ADA51F25-4808-47F4-BF6E-BCDC230DB01C}" type="datetimeFigureOut">
               <a:rPr lang="de-DE" smtClean="0"/>
-              <a:t>06.10.2025</a:t>
+              <a:t>07.10.2025</a:t>
             </a:fld>
             <a:endParaRPr lang="de-DE"/>
           </a:p>
@@ -2136,7 +2128,7 @@
           <a:p>
             <a:fld id="{ADA51F25-4808-47F4-BF6E-BCDC230DB01C}" type="datetimeFigureOut">
               <a:rPr lang="de-DE" smtClean="0"/>
-              <a:t>06.10.2025</a:t>
+              <a:t>07.10.2025</a:t>
             </a:fld>
             <a:endParaRPr lang="de-DE"/>
           </a:p>
@@ -2548,7 +2540,7 @@
           <a:p>
             <a:fld id="{ADA51F25-4808-47F4-BF6E-BCDC230DB01C}" type="datetimeFigureOut">
               <a:rPr lang="de-DE" smtClean="0"/>
-              <a:t>06.10.2025</a:t>
+              <a:t>07.10.2025</a:t>
             </a:fld>
             <a:endParaRPr lang="de-DE"/>
           </a:p>
@@ -2689,7 +2681,7 @@
           <a:p>
             <a:fld id="{ADA51F25-4808-47F4-BF6E-BCDC230DB01C}" type="datetimeFigureOut">
               <a:rPr lang="de-DE" smtClean="0"/>
-              <a:t>06.10.2025</a:t>
+              <a:t>07.10.2025</a:t>
             </a:fld>
             <a:endParaRPr lang="de-DE"/>
           </a:p>
@@ -2802,7 +2794,7 @@
           <a:p>
             <a:fld id="{ADA51F25-4808-47F4-BF6E-BCDC230DB01C}" type="datetimeFigureOut">
               <a:rPr lang="de-DE" smtClean="0"/>
-              <a:t>06.10.2025</a:t>
+              <a:t>07.10.2025</a:t>
             </a:fld>
             <a:endParaRPr lang="de-DE"/>
           </a:p>
@@ -3113,7 +3105,7 @@
           <a:p>
             <a:fld id="{ADA51F25-4808-47F4-BF6E-BCDC230DB01C}" type="datetimeFigureOut">
               <a:rPr lang="de-DE" smtClean="0"/>
-              <a:t>06.10.2025</a:t>
+              <a:t>07.10.2025</a:t>
             </a:fld>
             <a:endParaRPr lang="de-DE"/>
           </a:p>
@@ -3401,7 +3393,7 @@
           <a:p>
             <a:fld id="{ADA51F25-4808-47F4-BF6E-BCDC230DB01C}" type="datetimeFigureOut">
               <a:rPr lang="de-DE" smtClean="0"/>
-              <a:t>06.10.2025</a:t>
+              <a:t>07.10.2025</a:t>
             </a:fld>
             <a:endParaRPr lang="de-DE"/>
           </a:p>
@@ -3642,7 +3634,7 @@
           <a:p>
             <a:fld id="{ADA51F25-4808-47F4-BF6E-BCDC230DB01C}" type="datetimeFigureOut">
               <a:rPr lang="de-DE" smtClean="0"/>
-              <a:t>06.10.2025</a:t>
+              <a:t>07.10.2025</a:t>
             </a:fld>
             <a:endParaRPr lang="de-DE"/>
           </a:p>
@@ -4131,9 +4123,10 @@
           </a:p>
           <a:p>
             <a:r>
-              <a:rPr lang="en-US" noProof="0" dirty="0"/>
-              <a:t>08.10.2025</a:t>
-            </a:r>
+              <a:rPr lang="en-US" noProof="0"/>
+              <a:t>09.10.2025</a:t>
+            </a:r>
+            <a:endParaRPr lang="en-US" noProof="0" dirty="0"/>
           </a:p>
         </p:txBody>
       </p:sp>

--- a/Lectures/Chunk 9 - Matplotlib.pptx
+++ b/Lectures/Chunk 9 - Matplotlib.pptx
@@ -213,7 +213,7 @@
   <pc:docChgLst>
     <pc:chgData name="Jonathan Bollig" userId="8b5d0afe-f106-45e0-8c3f-fd98fa124db1" providerId="ADAL" clId="{B2469FA9-EBD8-4834-A16D-CBF8EFC907DD}"/>
     <pc:docChg chg="custSel addSld delSld modSld">
-      <pc:chgData name="Jonathan Bollig" userId="8b5d0afe-f106-45e0-8c3f-fd98fa124db1" providerId="ADAL" clId="{B2469FA9-EBD8-4834-A16D-CBF8EFC907DD}" dt="2025-10-07T00:02:20.001" v="20" actId="20577"/>
+      <pc:chgData name="Jonathan Bollig" userId="8b5d0afe-f106-45e0-8c3f-fd98fa124db1" providerId="ADAL" clId="{B2469FA9-EBD8-4834-A16D-CBF8EFC907DD}" dt="2025-10-07T16:34:13.962" v="39" actId="20577"/>
       <pc:docMkLst>
         <pc:docMk/>
       </pc:docMkLst>
@@ -274,6 +274,21 @@
           <pc:docMk/>
           <pc:sldMk cId="2113368255" sldId="269"/>
         </pc:sldMkLst>
+      </pc:sldChg>
+      <pc:sldChg chg="modSp mod">
+        <pc:chgData name="Jonathan Bollig" userId="8b5d0afe-f106-45e0-8c3f-fd98fa124db1" providerId="ADAL" clId="{B2469FA9-EBD8-4834-A16D-CBF8EFC907DD}" dt="2025-10-07T16:34:13.962" v="39" actId="20577"/>
+        <pc:sldMkLst>
+          <pc:docMk/>
+          <pc:sldMk cId="2693992445" sldId="271"/>
+        </pc:sldMkLst>
+        <pc:spChg chg="mod">
+          <ac:chgData name="Jonathan Bollig" userId="8b5d0afe-f106-45e0-8c3f-fd98fa124db1" providerId="ADAL" clId="{B2469FA9-EBD8-4834-A16D-CBF8EFC907DD}" dt="2025-10-07T16:34:13.962" v="39" actId="20577"/>
+          <ac:spMkLst>
+            <pc:docMk/>
+            <pc:sldMk cId="2693992445" sldId="271"/>
+            <ac:spMk id="2" creationId="{1402727D-356B-AE56-D94A-0E5E42768C9A}"/>
+          </ac:spMkLst>
+        </pc:spChg>
       </pc:sldChg>
     </pc:docChg>
   </pc:docChgLst>
@@ -4308,7 +4323,7 @@
           <a:p>
             <a:r>
               <a:rPr lang="en-US" noProof="0" dirty="0"/>
-              <a:t>Getting Started</a:t>
+              <a:t>Live Coding: Getting Started</a:t>
             </a:r>
           </a:p>
         </p:txBody>
